--- a/PPTs/App Deployment.pptx
+++ b/PPTs/App Deployment.pptx
@@ -5,10 +5,10 @@
     <p:sldMasterId id="2147483660" r:id="rId1"/>
   </p:sldMasterIdLst>
   <p:notesMasterIdLst>
-    <p:notesMasterId r:id="rId19"/>
+    <p:notesMasterId r:id="rId20"/>
   </p:notesMasterIdLst>
   <p:handoutMasterIdLst>
-    <p:handoutMasterId r:id="rId20"/>
+    <p:handoutMasterId r:id="rId21"/>
   </p:handoutMasterIdLst>
   <p:sldIdLst>
     <p:sldId id="256" r:id="rId2"/>
@@ -24,10 +24,11 @@
     <p:sldId id="1277" r:id="rId12"/>
     <p:sldId id="1271" r:id="rId13"/>
     <p:sldId id="1272" r:id="rId14"/>
-    <p:sldId id="1273" r:id="rId15"/>
-    <p:sldId id="1274" r:id="rId16"/>
-    <p:sldId id="1275" r:id="rId17"/>
-    <p:sldId id="1276" r:id="rId18"/>
+    <p:sldId id="1279" r:id="rId15"/>
+    <p:sldId id="1273" r:id="rId16"/>
+    <p:sldId id="1274" r:id="rId17"/>
+    <p:sldId id="1275" r:id="rId18"/>
+    <p:sldId id="1276" r:id="rId19"/>
   </p:sldIdLst>
   <p:sldSz cx="12192000" cy="6858000"/>
   <p:notesSz cx="6858000" cy="9144000"/>
@@ -148,6 +149,7 @@
             <p14:sldId id="1277"/>
             <p14:sldId id="1271"/>
             <p14:sldId id="1272"/>
+            <p14:sldId id="1279"/>
             <p14:sldId id="1273"/>
             <p14:sldId id="1274"/>
             <p14:sldId id="1275"/>
@@ -276,7 +278,7 @@
                 <a:latin typeface="맑은 고딕" panose="020B0503020000020004" pitchFamily="50" charset="-127"/>
                 <a:ea typeface="맑은 고딕" panose="020B0503020000020004" pitchFamily="50" charset="-127"/>
               </a:rPr>
-              <a:t>2026-08-21</a:t>
+              <a:t>2026-08-22</a:t>
             </a:fld>
             <a:endParaRPr lang="ko-KR" altLang="en-US">
               <a:latin typeface="맑은 고딕" panose="020B0503020000020004" pitchFamily="50" charset="-127"/>
@@ -462,7 +464,7 @@
           <a:p>
             <a:fld id="{43E1C3DD-4A19-441D-907C-380838DB51C4}" type="datetime1">
               <a:rPr lang="ko-KR" altLang="en-US" noProof="0" smtClean="0"/>
-              <a:t>2026-08-21</a:t>
+              <a:t>2026-08-22</a:t>
             </a:fld>
             <a:endParaRPr lang="ko-KR" altLang="en-US" noProof="0"/>
           </a:p>
@@ -1558,7 +1560,7 @@
           <a:p>
             <a:fld id="{990475B5-67CA-4281-BDCA-DA943C3C8EB3}" type="datetime1">
               <a:rPr lang="ko-KR" altLang="en-US" noProof="0" smtClean="0"/>
-              <a:t>2026-08-21</a:t>
+              <a:t>2026-08-22</a:t>
             </a:fld>
             <a:endParaRPr lang="ko-KR" altLang="en-US" noProof="0"/>
           </a:p>
@@ -2212,7 +2214,7 @@
           <a:p>
             <a:fld id="{48A87A34-81AB-432B-8DAE-1953F412C126}" type="datetimeFigureOut">
               <a:rPr lang="en-US" smtClean="0"/>
-              <a:t>8/21/2026</a:t>
+              <a:t>8/22/2026</a:t>
             </a:fld>
             <a:endParaRPr lang="en-US" dirty="0"/>
           </a:p>
@@ -2508,7 +2510,7 @@
           <a:p>
             <a:fld id="{C655C81E-72E7-4D05-94B5-F45B321A525D}" type="datetime1">
               <a:rPr lang="ko-KR" altLang="en-US" noProof="0" smtClean="0"/>
-              <a:t>2026-08-21</a:t>
+              <a:t>2026-08-22</a:t>
             </a:fld>
             <a:endParaRPr lang="ko-KR" altLang="en-US" noProof="0" dirty="0">
               <a:latin typeface="맑은 고딕" panose="020B0503020000020004" pitchFamily="50" charset="-127"/>
@@ -5991,6 +5993,51 @@
           </a:p>
         </p:txBody>
       </p:sp>
+      <p:sp>
+        <p:nvSpPr>
+          <p:cNvPr id="4" name="AutoShape 2" descr="codespaces-diagr...">
+            <a:extLst>
+              <a:ext uri="{FF2B5EF4-FFF2-40B4-BE49-F238E27FC236}">
+                <a16:creationId xmlns:a16="http://schemas.microsoft.com/office/drawing/2014/main" id="{51A44EDA-6546-C460-A540-066981071F85}"/>
+              </a:ext>
+            </a:extLst>
+          </p:cNvPr>
+          <p:cNvSpPr>
+            <a:spLocks noChangeAspect="1" noChangeArrowheads="1"/>
+          </p:cNvSpPr>
+          <p:nvPr/>
+        </p:nvSpPr>
+        <p:spPr bwMode="auto">
+          <a:xfrm>
+            <a:off x="5943600" y="3276600"/>
+            <a:ext cx="304800" cy="304800"/>
+          </a:xfrm>
+          <a:prstGeom prst="rect">
+            <a:avLst/>
+          </a:prstGeom>
+          <a:noFill/>
+          <a:extLst>
+            <a:ext uri="{909E8E84-426E-40DD-AFC4-6F175D3DCCD1}">
+              <a14:hiddenFill xmlns:a14="http://schemas.microsoft.com/office/drawing/2010/main">
+                <a:solidFill>
+                  <a:srgbClr val="FFFFFF"/>
+                </a:solidFill>
+              </a14:hiddenFill>
+            </a:ext>
+          </a:extLst>
+        </p:spPr>
+        <p:txBody>
+          <a:bodyPr vert="horz" wrap="square" lIns="91440" tIns="45720" rIns="91440" bIns="45720" numCol="1" anchor="t" anchorCtr="0" compatLnSpc="1">
+            <a:prstTxWarp prst="textNoShape">
+              <a:avLst/>
+            </a:prstTxWarp>
+          </a:bodyPr>
+          <a:lstStyle/>
+          <a:p>
+            <a:endParaRPr lang="ko-KR" altLang="en-US"/>
+          </a:p>
+        </p:txBody>
+      </p:sp>
     </p:spTree>
     <p:extLst>
       <p:ext uri="{BB962C8B-B14F-4D97-AF65-F5344CB8AC3E}">
@@ -6005,6 +6052,656 @@
 </file>
 
 <file path=ppt/slides/slide14.xml><?xml version="1.0" encoding="utf-8"?>
+<p:sld xmlns:a="http://schemas.openxmlformats.org/drawingml/2006/main" xmlns:r="http://schemas.openxmlformats.org/officeDocument/2006/relationships" xmlns:p="http://schemas.openxmlformats.org/presentationml/2006/main">
+  <p:cSld>
+    <p:spTree>
+      <p:nvGrpSpPr>
+        <p:cNvPr id="1" name="">
+          <a:extLst>
+            <a:ext uri="{FF2B5EF4-FFF2-40B4-BE49-F238E27FC236}">
+              <a16:creationId xmlns:a16="http://schemas.microsoft.com/office/drawing/2014/main" id="{1F8F4C71-CCA7-904E-5AD3-6DB3E5165871}"/>
+            </a:ext>
+          </a:extLst>
+        </p:cNvPr>
+        <p:cNvGrpSpPr/>
+        <p:nvPr/>
+      </p:nvGrpSpPr>
+      <p:grpSpPr>
+        <a:xfrm>
+          <a:off x="0" y="0"/>
+          <a:ext cx="0" cy="0"/>
+          <a:chOff x="0" y="0"/>
+          <a:chExt cx="0" cy="0"/>
+        </a:xfrm>
+      </p:grpSpPr>
+      <p:sp>
+        <p:nvSpPr>
+          <p:cNvPr id="3" name="제목 1">
+            <a:extLst>
+              <a:ext uri="{FF2B5EF4-FFF2-40B4-BE49-F238E27FC236}">
+                <a16:creationId xmlns:a16="http://schemas.microsoft.com/office/drawing/2014/main" id="{D70D1877-9404-2CC5-1F2D-0C27E6A35B65}"/>
+              </a:ext>
+            </a:extLst>
+          </p:cNvPr>
+          <p:cNvSpPr txBox="1">
+            <a:spLocks/>
+          </p:cNvSpPr>
+          <p:nvPr/>
+        </p:nvSpPr>
+        <p:spPr>
+          <a:xfrm>
+            <a:off x="475645" y="481983"/>
+            <a:ext cx="10353762" cy="766439"/>
+          </a:xfrm>
+          <a:prstGeom prst="rect">
+            <a:avLst/>
+          </a:prstGeom>
+        </p:spPr>
+        <p:txBody>
+          <a:bodyPr vert="horz" lIns="91440" tIns="45720" rIns="91440" bIns="45720" rtlCol="0" anchor="ctr">
+            <a:normAutofit/>
+          </a:bodyPr>
+          <a:lstStyle>
+            <a:lvl1pPr algn="ctr" defTabSz="914400" rtl="0" eaLnBrk="1" latinLnBrk="1" hangingPunct="1">
+              <a:lnSpc>
+                <a:spcPct val="90000"/>
+              </a:lnSpc>
+              <a:spcBef>
+                <a:spcPct val="0"/>
+              </a:spcBef>
+              <a:buNone/>
+              <a:defRPr sz="3200" kern="1200" cap="all" baseline="0">
+                <a:solidFill>
+                  <a:schemeClr val="tx1"/>
+                </a:solidFill>
+                <a:effectLst/>
+                <a:latin typeface="Batang" panose="02030600000101010101" pitchFamily="18" charset="-127"/>
+                <a:ea typeface="Batang" panose="02030600000101010101" pitchFamily="18" charset="-127"/>
+                <a:cs typeface="+mj-cs"/>
+              </a:defRPr>
+            </a:lvl1pPr>
+          </a:lstStyle>
+          <a:p>
+            <a:pPr algn="l"/>
+            <a:r>
+              <a:rPr lang="en-US" altLang="ko-KR" sz="2800" cap="none" dirty="0" err="1">
+                <a:solidFill>
+                  <a:schemeClr val="bg2">
+                    <a:lumMod val="25000"/>
+                  </a:schemeClr>
+                </a:solidFill>
+                <a:latin typeface="D2Coding" panose="020B0609020101020101" pitchFamily="49" charset="-127"/>
+                <a:ea typeface="D2Coding" panose="020B0609020101020101" pitchFamily="49" charset="-127"/>
+                <a:cs typeface="Segoe UI Light" panose="020B0502040204020203" pitchFamily="34" charset="0"/>
+              </a:rPr>
+              <a:t>Github</a:t>
+            </a:r>
+            <a:r>
+              <a:rPr lang="en-US" altLang="ko-KR" sz="2800" cap="none" dirty="0">
+                <a:solidFill>
+                  <a:schemeClr val="bg2">
+                    <a:lumMod val="25000"/>
+                  </a:schemeClr>
+                </a:solidFill>
+                <a:latin typeface="D2Coding" panose="020B0609020101020101" pitchFamily="49" charset="-127"/>
+                <a:ea typeface="D2Coding" panose="020B0609020101020101" pitchFamily="49" charset="-127"/>
+                <a:cs typeface="Segoe UI Light" panose="020B0502040204020203" pitchFamily="34" charset="0"/>
+              </a:rPr>
+              <a:t> </a:t>
+            </a:r>
+            <a:r>
+              <a:rPr lang="en-US" altLang="ko-KR" sz="2800" cap="none" dirty="0" err="1">
+                <a:solidFill>
+                  <a:schemeClr val="bg2">
+                    <a:lumMod val="25000"/>
+                  </a:schemeClr>
+                </a:solidFill>
+                <a:latin typeface="D2Coding" panose="020B0609020101020101" pitchFamily="49" charset="-127"/>
+                <a:ea typeface="D2Coding" panose="020B0609020101020101" pitchFamily="49" charset="-127"/>
+                <a:cs typeface="Segoe UI Light" panose="020B0502040204020203" pitchFamily="34" charset="0"/>
+              </a:rPr>
+              <a:t>codespaces</a:t>
+            </a:r>
+            <a:endParaRPr lang="ko-KR" altLang="en-US" sz="2800" cap="none" dirty="0">
+              <a:solidFill>
+                <a:schemeClr val="bg2">
+                  <a:lumMod val="25000"/>
+                </a:schemeClr>
+              </a:solidFill>
+              <a:latin typeface="D2Coding" panose="020B0609020101020101" pitchFamily="49" charset="-127"/>
+              <a:ea typeface="D2Coding" panose="020B0609020101020101" pitchFamily="49" charset="-127"/>
+              <a:cs typeface="Segoe UI Light" panose="020B0502040204020203" pitchFamily="34" charset="0"/>
+            </a:endParaRPr>
+          </a:p>
+        </p:txBody>
+      </p:sp>
+      <p:sp>
+        <p:nvSpPr>
+          <p:cNvPr id="8" name="TextBox 7">
+            <a:extLst>
+              <a:ext uri="{FF2B5EF4-FFF2-40B4-BE49-F238E27FC236}">
+                <a16:creationId xmlns:a16="http://schemas.microsoft.com/office/drawing/2014/main" id="{27619A4B-0E0D-238F-EF7A-0F5BDE1A44AE}"/>
+              </a:ext>
+            </a:extLst>
+          </p:cNvPr>
+          <p:cNvSpPr txBox="1"/>
+          <p:nvPr/>
+        </p:nvSpPr>
+        <p:spPr>
+          <a:xfrm>
+            <a:off x="744020" y="3244334"/>
+            <a:ext cx="184731" cy="369332"/>
+          </a:xfrm>
+          <a:prstGeom prst="rect">
+            <a:avLst/>
+          </a:prstGeom>
+          <a:noFill/>
+        </p:spPr>
+        <p:txBody>
+          <a:bodyPr wrap="none" rtlCol="0">
+            <a:spAutoFit/>
+          </a:bodyPr>
+          <a:lstStyle/>
+          <a:p>
+            <a:endParaRPr lang="ko-KR" altLang="en-US" dirty="0">
+              <a:solidFill>
+                <a:schemeClr val="accent5"/>
+              </a:solidFill>
+              <a:latin typeface="D2Coding" panose="020B0609020101020101" pitchFamily="49" charset="-127"/>
+              <a:ea typeface="D2Coding" panose="020B0609020101020101" pitchFamily="49" charset="-127"/>
+            </a:endParaRPr>
+          </a:p>
+        </p:txBody>
+      </p:sp>
+      <p:sp>
+        <p:nvSpPr>
+          <p:cNvPr id="2" name="슬라이드 번호 개체 틀 3">
+            <a:extLst>
+              <a:ext uri="{FF2B5EF4-FFF2-40B4-BE49-F238E27FC236}">
+                <a16:creationId xmlns:a16="http://schemas.microsoft.com/office/drawing/2014/main" id="{C6B9ECC5-AF6A-0EB3-8505-080581D81DEC}"/>
+              </a:ext>
+            </a:extLst>
+          </p:cNvPr>
+          <p:cNvSpPr txBox="1">
+            <a:spLocks/>
+          </p:cNvSpPr>
+          <p:nvPr/>
+        </p:nvSpPr>
+        <p:spPr>
+          <a:xfrm>
+            <a:off x="11180761" y="299420"/>
+            <a:ext cx="753545" cy="365125"/>
+          </a:xfrm>
+          <a:prstGeom prst="rect">
+            <a:avLst/>
+          </a:prstGeom>
+        </p:spPr>
+        <p:txBody>
+          <a:bodyPr vert="horz" lIns="91440" tIns="45720" rIns="91440" bIns="45720" rtlCol="0" anchor="ctr"/>
+          <a:lstStyle>
+            <a:defPPr rtl="0">
+              <a:defRPr lang="ko-KR"/>
+            </a:defPPr>
+            <a:lvl1pPr marL="0" algn="r" defTabSz="914400" rtl="0" eaLnBrk="1" latinLnBrk="0" hangingPunct="1">
+              <a:defRPr sz="1200" kern="1200" baseline="0">
+                <a:solidFill>
+                  <a:schemeClr val="tx1">
+                    <a:lumMod val="65000"/>
+                    <a:lumOff val="35000"/>
+                  </a:schemeClr>
+                </a:solidFill>
+                <a:latin typeface="맑은 고딕" panose="020B0503020000020004" pitchFamily="50" charset="-127"/>
+                <a:ea typeface="맑은 고딕" panose="020B0503020000020004" pitchFamily="50" charset="-127"/>
+                <a:cs typeface="+mn-cs"/>
+              </a:defRPr>
+            </a:lvl1pPr>
+            <a:lvl2pPr marL="457200" algn="l" defTabSz="914400" rtl="0" eaLnBrk="1" latinLnBrk="0" hangingPunct="1">
+              <a:defRPr sz="1800" kern="1200">
+                <a:solidFill>
+                  <a:schemeClr val="tx1"/>
+                </a:solidFill>
+                <a:latin typeface="+mn-lt"/>
+                <a:ea typeface="+mn-ea"/>
+                <a:cs typeface="+mn-cs"/>
+              </a:defRPr>
+            </a:lvl2pPr>
+            <a:lvl3pPr marL="914400" algn="l" defTabSz="914400" rtl="0" eaLnBrk="1" latinLnBrk="0" hangingPunct="1">
+              <a:defRPr sz="1800" kern="1200">
+                <a:solidFill>
+                  <a:schemeClr val="tx1"/>
+                </a:solidFill>
+                <a:latin typeface="+mn-lt"/>
+                <a:ea typeface="+mn-ea"/>
+                <a:cs typeface="+mn-cs"/>
+              </a:defRPr>
+            </a:lvl3pPr>
+            <a:lvl4pPr marL="1371600" algn="l" defTabSz="914400" rtl="0" eaLnBrk="1" latinLnBrk="0" hangingPunct="1">
+              <a:defRPr sz="1800" kern="1200">
+                <a:solidFill>
+                  <a:schemeClr val="tx1"/>
+                </a:solidFill>
+                <a:latin typeface="+mn-lt"/>
+                <a:ea typeface="+mn-ea"/>
+                <a:cs typeface="+mn-cs"/>
+              </a:defRPr>
+            </a:lvl4pPr>
+            <a:lvl5pPr marL="1828800" algn="l" defTabSz="914400" rtl="0" eaLnBrk="1" latinLnBrk="0" hangingPunct="1">
+              <a:defRPr sz="1800" kern="1200">
+                <a:solidFill>
+                  <a:schemeClr val="tx1"/>
+                </a:solidFill>
+                <a:latin typeface="+mn-lt"/>
+                <a:ea typeface="+mn-ea"/>
+                <a:cs typeface="+mn-cs"/>
+              </a:defRPr>
+            </a:lvl5pPr>
+            <a:lvl6pPr marL="2286000" algn="l" defTabSz="914400" rtl="0" eaLnBrk="1" latinLnBrk="0" hangingPunct="1">
+              <a:defRPr sz="1800" kern="1200">
+                <a:solidFill>
+                  <a:schemeClr val="tx1"/>
+                </a:solidFill>
+                <a:latin typeface="+mn-lt"/>
+                <a:ea typeface="+mn-ea"/>
+                <a:cs typeface="+mn-cs"/>
+              </a:defRPr>
+            </a:lvl6pPr>
+            <a:lvl7pPr marL="2743200" algn="l" defTabSz="914400" rtl="0" eaLnBrk="1" latinLnBrk="0" hangingPunct="1">
+              <a:defRPr sz="1800" kern="1200">
+                <a:solidFill>
+                  <a:schemeClr val="tx1"/>
+                </a:solidFill>
+                <a:latin typeface="+mn-lt"/>
+                <a:ea typeface="+mn-ea"/>
+                <a:cs typeface="+mn-cs"/>
+              </a:defRPr>
+            </a:lvl7pPr>
+            <a:lvl8pPr marL="3200400" algn="l" defTabSz="914400" rtl="0" eaLnBrk="1" latinLnBrk="0" hangingPunct="1">
+              <a:defRPr sz="1800" kern="1200">
+                <a:solidFill>
+                  <a:schemeClr val="tx1"/>
+                </a:solidFill>
+                <a:latin typeface="+mn-lt"/>
+                <a:ea typeface="+mn-ea"/>
+                <a:cs typeface="+mn-cs"/>
+              </a:defRPr>
+            </a:lvl8pPr>
+            <a:lvl9pPr marL="3657600" algn="l" defTabSz="914400" rtl="0" eaLnBrk="1" latinLnBrk="0" hangingPunct="1">
+              <a:defRPr sz="1800" kern="1200">
+                <a:solidFill>
+                  <a:schemeClr val="tx1"/>
+                </a:solidFill>
+                <a:latin typeface="+mn-lt"/>
+                <a:ea typeface="+mn-ea"/>
+                <a:cs typeface="+mn-cs"/>
+              </a:defRPr>
+            </a:lvl9pPr>
+          </a:lstStyle>
+          <a:p>
+            <a:fld id="{D57F1E4F-1CFF-5643-939E-217C01CDF565}" type="slidenum">
+              <a:rPr lang="en-US" b="1" smtClean="0">
+                <a:latin typeface="Segoe UI Emoji" panose="020B0502040204020203" pitchFamily="34" charset="0"/>
+                <a:ea typeface="Segoe UI Emoji" panose="020B0502040204020203" pitchFamily="34" charset="0"/>
+              </a:rPr>
+              <a:pPr/>
+              <a:t>14</a:t>
+            </a:fld>
+            <a:endParaRPr lang="en-US" b="1" dirty="0">
+              <a:latin typeface="Segoe UI Emoji" panose="020B0502040204020203" pitchFamily="34" charset="0"/>
+              <a:ea typeface="Segoe UI Emoji" panose="020B0502040204020203" pitchFamily="34" charset="0"/>
+            </a:endParaRPr>
+          </a:p>
+        </p:txBody>
+      </p:sp>
+      <p:pic>
+        <p:nvPicPr>
+          <p:cNvPr id="10" name="그래픽 9" descr="수영">
+            <a:extLst>
+              <a:ext uri="{FF2B5EF4-FFF2-40B4-BE49-F238E27FC236}">
+                <a16:creationId xmlns:a16="http://schemas.microsoft.com/office/drawing/2014/main" id="{0F8339C8-7D95-0EEB-9627-D78A143F295D}"/>
+              </a:ext>
+            </a:extLst>
+          </p:cNvPr>
+          <p:cNvPicPr>
+            <a:picLocks noChangeAspect="1"/>
+          </p:cNvPicPr>
+          <p:nvPr/>
+        </p:nvPicPr>
+        <p:blipFill>
+          <a:blip r:embed="rId2">
+            <a:extLst>
+              <a:ext uri="{96DAC541-7B7A-43D3-8B79-37D633B846F1}">
+                <asvg:svgBlip xmlns:asvg="http://schemas.microsoft.com/office/drawing/2016/SVG/main" r:embed="rId3"/>
+              </a:ext>
+            </a:extLst>
+          </a:blip>
+          <a:stretch>
+            <a:fillRect/>
+          </a:stretch>
+        </p:blipFill>
+        <p:spPr>
+          <a:xfrm>
+            <a:off x="10685980" y="373930"/>
+            <a:ext cx="914400" cy="914400"/>
+          </a:xfrm>
+          <a:prstGeom prst="rect">
+            <a:avLst/>
+          </a:prstGeom>
+        </p:spPr>
+      </p:pic>
+      <p:sp>
+        <p:nvSpPr>
+          <p:cNvPr id="7" name="Rectangle 1">
+            <a:extLst>
+              <a:ext uri="{FF2B5EF4-FFF2-40B4-BE49-F238E27FC236}">
+                <a16:creationId xmlns:a16="http://schemas.microsoft.com/office/drawing/2014/main" id="{5F3E9670-79F0-BA69-1BA2-85611ABD289A}"/>
+              </a:ext>
+            </a:extLst>
+          </p:cNvPr>
+          <p:cNvSpPr>
+            <a:spLocks noChangeArrowheads="1"/>
+          </p:cNvSpPr>
+          <p:nvPr/>
+        </p:nvSpPr>
+        <p:spPr bwMode="auto">
+          <a:xfrm>
+            <a:off x="581025" y="1228241"/>
+            <a:ext cx="11353281" cy="793166"/>
+          </a:xfrm>
+          <a:prstGeom prst="rect">
+            <a:avLst/>
+          </a:prstGeom>
+          <a:noFill/>
+          <a:ln>
+            <a:noFill/>
+          </a:ln>
+          <a:effectLst/>
+          <a:extLst>
+            <a:ext uri="{909E8E84-426E-40DD-AFC4-6F175D3DCCD1}">
+              <a14:hiddenFill xmlns:a14="http://schemas.microsoft.com/office/drawing/2010/main">
+                <a:solidFill>
+                  <a:schemeClr val="accent1"/>
+                </a:solidFill>
+              </a14:hiddenFill>
+            </a:ext>
+            <a:ext uri="{91240B29-F687-4F45-9708-019B960494DF}">
+              <a14:hiddenLine xmlns:a14="http://schemas.microsoft.com/office/drawing/2010/main" w="9525">
+                <a:solidFill>
+                  <a:schemeClr val="tx1"/>
+                </a:solidFill>
+                <a:miter lim="800000"/>
+                <a:headEnd/>
+                <a:tailEnd/>
+              </a14:hiddenLine>
+            </a:ext>
+            <a:ext uri="{AF507438-7753-43E0-B8FC-AC1667EBCBE1}">
+              <a14:hiddenEffects xmlns:a14="http://schemas.microsoft.com/office/drawing/2010/main">
+                <a:effectLst>
+                  <a:outerShdw dist="35921" dir="2700000" algn="ctr" rotWithShape="0">
+                    <a:schemeClr val="bg2"/>
+                  </a:outerShdw>
+                </a:effectLst>
+              </a14:hiddenEffects>
+            </a:ext>
+          </a:extLst>
+        </p:spPr>
+        <p:txBody>
+          <a:bodyPr vert="horz" wrap="square" lIns="91440" tIns="45720" rIns="91440" bIns="45720" numCol="1" anchor="ctr" anchorCtr="0" compatLnSpc="1">
+            <a:prstTxWarp prst="textNoShape">
+              <a:avLst/>
+            </a:prstTxWarp>
+            <a:spAutoFit/>
+          </a:bodyPr>
+          <a:lstStyle/>
+          <a:p>
+            <a:pPr marL="285750" lvl="0" indent="-285750" eaLnBrk="0" fontAlgn="base" hangingPunct="0">
+              <a:lnSpc>
+                <a:spcPct val="150000"/>
+              </a:lnSpc>
+              <a:spcBef>
+                <a:spcPct val="0"/>
+              </a:spcBef>
+              <a:spcAft>
+                <a:spcPct val="0"/>
+              </a:spcAft>
+              <a:buFont typeface="Wingdings" panose="05000000000000000000" pitchFamily="2" charset="2"/>
+              <a:buChar char="v"/>
+            </a:pPr>
+            <a:r>
+              <a:rPr lang="en-US" altLang="ko-KR" sz="1600" dirty="0">
+                <a:latin typeface="D2Coding" panose="020B0609020101020101" pitchFamily="49" charset="-127"/>
+                <a:ea typeface="D2Coding" panose="020B0609020101020101" pitchFamily="49" charset="-127"/>
+                <a:hlinkClick r:id="rId4" tooltip="GitHub">
+                  <a:extLst>
+                    <a:ext uri="{A12FA001-AC4F-418D-AE19-62706E023703}">
+                      <ahyp:hlinkClr xmlns:ahyp="http://schemas.microsoft.com/office/drawing/2018/hyperlinkcolor" val="tx"/>
+                    </a:ext>
+                  </a:extLst>
+                </a:hlinkClick>
+              </a:rPr>
+              <a:t>GitHub</a:t>
+            </a:r>
+            <a:r>
+              <a:rPr lang="ko-KR" altLang="en-US" sz="1600" dirty="0">
+                <a:latin typeface="D2Coding" panose="020B0609020101020101" pitchFamily="49" charset="-127"/>
+                <a:ea typeface="D2Coding" panose="020B0609020101020101" pitchFamily="49" charset="-127"/>
+              </a:rPr>
+              <a:t>이 제공하는 </a:t>
+            </a:r>
+            <a:r>
+              <a:rPr lang="en-US" altLang="ko-KR" sz="1600" dirty="0">
+                <a:latin typeface="D2Coding" panose="020B0609020101020101" pitchFamily="49" charset="-127"/>
+                <a:ea typeface="D2Coding" panose="020B0609020101020101" pitchFamily="49" charset="-127"/>
+                <a:hlinkClick r:id="rId5" tooltip="Visual Studio Code">
+                  <a:extLst>
+                    <a:ext uri="{A12FA001-AC4F-418D-AE19-62706E023703}">
+                      <ahyp:hlinkClr xmlns:ahyp="http://schemas.microsoft.com/office/drawing/2018/hyperlinkcolor" val="tx"/>
+                    </a:ext>
+                  </a:extLst>
+                </a:hlinkClick>
+              </a:rPr>
+              <a:t>Visual Studio Code</a:t>
+            </a:r>
+            <a:r>
+              <a:rPr lang="ko-KR" altLang="en-US" sz="1600" dirty="0">
+                <a:latin typeface="D2Coding" panose="020B0609020101020101" pitchFamily="49" charset="-127"/>
+                <a:ea typeface="D2Coding" panose="020B0609020101020101" pitchFamily="49" charset="-127"/>
+              </a:rPr>
+              <a:t> 기반 클라우드 서비스로</a:t>
+            </a:r>
+            <a:r>
+              <a:rPr lang="en-US" altLang="ko-KR" sz="1600" dirty="0">
+                <a:latin typeface="D2Coding" panose="020B0609020101020101" pitchFamily="49" charset="-127"/>
+                <a:ea typeface="D2Coding" panose="020B0609020101020101" pitchFamily="49" charset="-127"/>
+              </a:rPr>
+              <a:t>, </a:t>
+            </a:r>
+            <a:r>
+              <a:rPr lang="en-US" altLang="ko-KR" sz="1600" dirty="0">
+                <a:latin typeface="D2Coding" panose="020B0609020101020101" pitchFamily="49" charset="-127"/>
+                <a:ea typeface="D2Coding" panose="020B0609020101020101" pitchFamily="49" charset="-127"/>
+                <a:hlinkClick r:id="rId6" tooltip="GitHub/저장소">
+                  <a:extLst>
+                    <a:ext uri="{A12FA001-AC4F-418D-AE19-62706E023703}">
+                      <ahyp:hlinkClr xmlns:ahyp="http://schemas.microsoft.com/office/drawing/2018/hyperlinkcolor" val="tx"/>
+                    </a:ext>
+                  </a:extLst>
+                </a:hlinkClick>
+              </a:rPr>
+              <a:t>GitHub </a:t>
+            </a:r>
+            <a:r>
+              <a:rPr lang="ko-KR" altLang="en-US" sz="1600" dirty="0">
+                <a:latin typeface="D2Coding" panose="020B0609020101020101" pitchFamily="49" charset="-127"/>
+                <a:ea typeface="D2Coding" panose="020B0609020101020101" pitchFamily="49" charset="-127"/>
+                <a:hlinkClick r:id="rId6" tooltip="GitHub/저장소">
+                  <a:extLst>
+                    <a:ext uri="{A12FA001-AC4F-418D-AE19-62706E023703}">
+                      <ahyp:hlinkClr xmlns:ahyp="http://schemas.microsoft.com/office/drawing/2018/hyperlinkcolor" val="tx"/>
+                    </a:ext>
+                  </a:extLst>
+                </a:hlinkClick>
+              </a:rPr>
+              <a:t>저장소</a:t>
+            </a:r>
+            <a:r>
+              <a:rPr lang="ko-KR" altLang="en-US" sz="1600" dirty="0">
+                <a:latin typeface="D2Coding" panose="020B0609020101020101" pitchFamily="49" charset="-127"/>
+                <a:ea typeface="D2Coding" panose="020B0609020101020101" pitchFamily="49" charset="-127"/>
+              </a:rPr>
+              <a:t> 내의 코드를 편집할 수 있는 </a:t>
+            </a:r>
+            <a:r>
+              <a:rPr lang="ko-KR" altLang="en-US" sz="1600" dirty="0">
+                <a:latin typeface="D2Coding" panose="020B0609020101020101" pitchFamily="49" charset="-127"/>
+                <a:ea typeface="D2Coding" panose="020B0609020101020101" pitchFamily="49" charset="-127"/>
+                <a:hlinkClick r:id="rId7" tooltip="개발환경">
+                  <a:extLst>
+                    <a:ext uri="{A12FA001-AC4F-418D-AE19-62706E023703}">
+                      <ahyp:hlinkClr xmlns:ahyp="http://schemas.microsoft.com/office/drawing/2018/hyperlinkcolor" val="tx"/>
+                    </a:ext>
+                  </a:extLst>
+                </a:hlinkClick>
+              </a:rPr>
+              <a:t>개발환경</a:t>
+            </a:r>
+            <a:r>
+              <a:rPr lang="ko-KR" altLang="en-US" sz="1600" dirty="0">
+                <a:latin typeface="D2Coding" panose="020B0609020101020101" pitchFamily="49" charset="-127"/>
+                <a:ea typeface="D2Coding" panose="020B0609020101020101" pitchFamily="49" charset="-127"/>
+              </a:rPr>
+              <a:t>을 </a:t>
+            </a:r>
+            <a:r>
+              <a:rPr lang="ko-KR" altLang="en-US" sz="1600" dirty="0">
+                <a:latin typeface="D2Coding" panose="020B0609020101020101" pitchFamily="49" charset="-127"/>
+                <a:ea typeface="D2Coding" panose="020B0609020101020101" pitchFamily="49" charset="-127"/>
+                <a:hlinkClick r:id="rId8" tooltip="클라우드 컴퓨팅">
+                  <a:extLst>
+                    <a:ext uri="{A12FA001-AC4F-418D-AE19-62706E023703}">
+                      <ahyp:hlinkClr xmlns:ahyp="http://schemas.microsoft.com/office/drawing/2018/hyperlinkcolor" val="tx"/>
+                    </a:ext>
+                  </a:extLst>
+                </a:hlinkClick>
+              </a:rPr>
+              <a:t>클라우드</a:t>
+            </a:r>
+            <a:r>
+              <a:rPr lang="ko-KR" altLang="en-US" sz="1600" dirty="0">
+                <a:latin typeface="D2Coding" panose="020B0609020101020101" pitchFamily="49" charset="-127"/>
+                <a:ea typeface="D2Coding" panose="020B0609020101020101" pitchFamily="49" charset="-127"/>
+              </a:rPr>
+              <a:t>에 구성해 원격으로 접속할 수 있는 가상 </a:t>
+            </a:r>
+            <a:r>
+              <a:rPr lang="ko-KR" altLang="en-US" sz="1600" dirty="0">
+                <a:latin typeface="D2Coding" panose="020B0609020101020101" pitchFamily="49" charset="-127"/>
+                <a:ea typeface="D2Coding" panose="020B0609020101020101" pitchFamily="49" charset="-127"/>
+                <a:hlinkClick r:id="rId9" tooltip="통합 개발 환경">
+                  <a:extLst>
+                    <a:ext uri="{A12FA001-AC4F-418D-AE19-62706E023703}">
+                      <ahyp:hlinkClr xmlns:ahyp="http://schemas.microsoft.com/office/drawing/2018/hyperlinkcolor" val="tx"/>
+                    </a:ext>
+                  </a:extLst>
+                </a:hlinkClick>
+              </a:rPr>
+              <a:t>통합 개발 환경</a:t>
+            </a:r>
+            <a:endParaRPr lang="ko-KR" altLang="ko-KR" sz="1600" dirty="0">
+              <a:latin typeface="D2Coding" panose="020B0609020101020101" pitchFamily="49" charset="-127"/>
+              <a:ea typeface="D2Coding" panose="020B0609020101020101" pitchFamily="49" charset="-127"/>
+            </a:endParaRPr>
+          </a:p>
+        </p:txBody>
+      </p:sp>
+      <p:sp>
+        <p:nvSpPr>
+          <p:cNvPr id="4" name="AutoShape 2" descr="codespaces-diagr...">
+            <a:extLst>
+              <a:ext uri="{FF2B5EF4-FFF2-40B4-BE49-F238E27FC236}">
+                <a16:creationId xmlns:a16="http://schemas.microsoft.com/office/drawing/2014/main" id="{AECABC7A-19CB-2A9F-A587-7CF140260B7A}"/>
+              </a:ext>
+            </a:extLst>
+          </p:cNvPr>
+          <p:cNvSpPr>
+            <a:spLocks noChangeAspect="1" noChangeArrowheads="1"/>
+          </p:cNvSpPr>
+          <p:nvPr/>
+        </p:nvSpPr>
+        <p:spPr bwMode="auto">
+          <a:xfrm>
+            <a:off x="5943600" y="3276600"/>
+            <a:ext cx="304800" cy="304800"/>
+          </a:xfrm>
+          <a:prstGeom prst="rect">
+            <a:avLst/>
+          </a:prstGeom>
+          <a:noFill/>
+          <a:extLst>
+            <a:ext uri="{909E8E84-426E-40DD-AFC4-6F175D3DCCD1}">
+              <a14:hiddenFill xmlns:a14="http://schemas.microsoft.com/office/drawing/2010/main">
+                <a:solidFill>
+                  <a:srgbClr val="FFFFFF"/>
+                </a:solidFill>
+              </a14:hiddenFill>
+            </a:ext>
+          </a:extLst>
+        </p:spPr>
+        <p:txBody>
+          <a:bodyPr vert="horz" wrap="square" lIns="91440" tIns="45720" rIns="91440" bIns="45720" numCol="1" anchor="t" anchorCtr="0" compatLnSpc="1">
+            <a:prstTxWarp prst="textNoShape">
+              <a:avLst/>
+            </a:prstTxWarp>
+          </a:bodyPr>
+          <a:lstStyle/>
+          <a:p>
+            <a:endParaRPr lang="ko-KR" altLang="en-US"/>
+          </a:p>
+        </p:txBody>
+      </p:sp>
+      <p:pic>
+        <p:nvPicPr>
+          <p:cNvPr id="9" name="그림 8">
+            <a:extLst>
+              <a:ext uri="{FF2B5EF4-FFF2-40B4-BE49-F238E27FC236}">
+                <a16:creationId xmlns:a16="http://schemas.microsoft.com/office/drawing/2014/main" id="{274E7D49-08E8-04CB-D1EF-EFE0C7602BDB}"/>
+              </a:ext>
+            </a:extLst>
+          </p:cNvPr>
+          <p:cNvPicPr>
+            <a:picLocks noChangeAspect="1"/>
+          </p:cNvPicPr>
+          <p:nvPr/>
+        </p:nvPicPr>
+        <p:blipFill>
+          <a:blip r:embed="rId10"/>
+          <a:stretch>
+            <a:fillRect/>
+          </a:stretch>
+        </p:blipFill>
+        <p:spPr>
+          <a:xfrm>
+            <a:off x="2777334" y="2184725"/>
+            <a:ext cx="6332531" cy="4322524"/>
+          </a:xfrm>
+          <a:prstGeom prst="rect">
+            <a:avLst/>
+          </a:prstGeom>
+        </p:spPr>
+      </p:pic>
+    </p:spTree>
+    <p:extLst>
+      <p:ext uri="{BB962C8B-B14F-4D97-AF65-F5344CB8AC3E}">
+        <p14:creationId xmlns:p14="http://schemas.microsoft.com/office/powerpoint/2010/main" val="3647522795"/>
+      </p:ext>
+    </p:extLst>
+  </p:cSld>
+  <p:clrMapOvr>
+    <a:masterClrMapping/>
+  </p:clrMapOvr>
+</p:sld>
+</file>
+
+<file path=ppt/slides/slide15.xml><?xml version="1.0" encoding="utf-8"?>
 <p:sld xmlns:a="http://schemas.openxmlformats.org/drawingml/2006/main" xmlns:r="http://schemas.openxmlformats.org/officeDocument/2006/relationships" xmlns:p="http://schemas.openxmlformats.org/presentationml/2006/main">
   <p:cSld>
     <p:spTree>
@@ -6270,7 +6967,7 @@
                 <a:ea typeface="Segoe UI Emoji" panose="020B0502040204020203" pitchFamily="34" charset="0"/>
               </a:rPr>
               <a:pPr/>
-              <a:t>14</a:t>
+              <a:t>15</a:t>
             </a:fld>
             <a:endParaRPr lang="en-US" b="1" dirty="0">
               <a:latin typeface="Segoe UI Emoji" panose="020B0502040204020203" pitchFamily="34" charset="0"/>
@@ -6358,7 +7055,7 @@
 </p:sld>
 </file>
 
-<file path=ppt/slides/slide15.xml><?xml version="1.0" encoding="utf-8"?>
+<file path=ppt/slides/slide16.xml><?xml version="1.0" encoding="utf-8"?>
 <p:sld xmlns:a="http://schemas.openxmlformats.org/drawingml/2006/main" xmlns:r="http://schemas.openxmlformats.org/officeDocument/2006/relationships" xmlns:p="http://schemas.openxmlformats.org/presentationml/2006/main">
   <p:cSld>
     <p:spTree>
@@ -6624,7 +7321,7 @@
                 <a:ea typeface="Segoe UI Emoji" panose="020B0502040204020203" pitchFamily="34" charset="0"/>
               </a:rPr>
               <a:pPr/>
-              <a:t>15</a:t>
+              <a:t>16</a:t>
             </a:fld>
             <a:endParaRPr lang="en-US" b="1" dirty="0">
               <a:latin typeface="Segoe UI Emoji" panose="020B0502040204020203" pitchFamily="34" charset="0"/>
@@ -6856,7 +7553,7 @@
 </p:sld>
 </file>
 
-<file path=ppt/slides/slide16.xml><?xml version="1.0" encoding="utf-8"?>
+<file path=ppt/slides/slide17.xml><?xml version="1.0" encoding="utf-8"?>
 <p:sld xmlns:a="http://schemas.openxmlformats.org/drawingml/2006/main" xmlns:r="http://schemas.openxmlformats.org/officeDocument/2006/relationships" xmlns:p="http://schemas.openxmlformats.org/presentationml/2006/main">
   <p:cSld>
     <p:spTree>
@@ -7122,7 +7819,7 @@
                 <a:ea typeface="Segoe UI Emoji" panose="020B0502040204020203" pitchFamily="34" charset="0"/>
               </a:rPr>
               <a:pPr/>
-              <a:t>16</a:t>
+              <a:t>17</a:t>
             </a:fld>
             <a:endParaRPr lang="en-US" b="1" dirty="0">
               <a:latin typeface="Segoe UI Emoji" panose="020B0502040204020203" pitchFamily="34" charset="0"/>
@@ -7624,7 +8321,7 @@
 </p:sld>
 </file>
 
-<file path=ppt/slides/slide17.xml><?xml version="1.0" encoding="utf-8"?>
+<file path=ppt/slides/slide18.xml><?xml version="1.0" encoding="utf-8"?>
 <p:sld xmlns:a="http://schemas.openxmlformats.org/drawingml/2006/main" xmlns:r="http://schemas.openxmlformats.org/officeDocument/2006/relationships" xmlns:p="http://schemas.openxmlformats.org/presentationml/2006/main">
   <p:cSld>
     <p:spTree>
@@ -7919,7 +8616,7 @@
                 <a:ea typeface="Segoe UI Emoji" panose="020B0502040204020203" pitchFamily="34" charset="0"/>
               </a:rPr>
               <a:pPr/>
-              <a:t>17</a:t>
+              <a:t>18</a:t>
             </a:fld>
             <a:endParaRPr lang="en-US" b="1" dirty="0">
               <a:latin typeface="Segoe UI Emoji" panose="020B0502040204020203" pitchFamily="34" charset="0"/>
